--- a/decks/geog-rivers/geog-rivers_ch4_landforms.pptx
+++ b/decks/geog-rivers/geog-rivers_ch4_landforms.pptx
@@ -126,30 +126,30 @@
   <p:extLst>
     <p:ext uri="{521415D9-36F7-43E2-AB2F-B90AF26B5E84}">
       <p14:sectionLst xmlns:p14="http://schemas.microsoft.com/office/powerpoint/2010/main">
-        <p14:section name="Opening" id="{e752808c-ff13-fd2a-dc4a-f6a780e06283}">
+        <p14:section name="Opening" id="{cca54645-76b3-151b-8e5f-8832cba302a7}">
           <p14:sldIdLst>
             <p14:sldId id="256"/>
           </p14:sldIdLst>
         </p14:section>
-        <p14:section name="Gate" id="{01993c0d-8d09-ede7-80ff-430eb897f7d8}">
+        <p14:section name="Gate" id="{e7644fea-74d5-83ba-7d7d-8e55f71b1daf}">
           <p14:sldIdLst>
             <p14:sldId id="257"/>
             <p14:sldId id="258"/>
           </p14:sldIdLst>
         </p14:section>
-        <p14:section name="Pre-teach" id="{dfb21f1d-80da-f7cd-e918-e7477fdeff72}">
+        <p14:section name="Pre-teach" id="{b97ce900-b90d-a8d0-7e04-5bc0b39e1c93}">
           <p14:sldIdLst>
             <p14:sldId id="259"/>
             <p14:sldId id="260"/>
           </p14:sldIdLst>
         </p14:section>
-        <p14:section name="Read-along" id="{afb68073-e125-b381-ac58-0b7127b0ab31}">
+        <p14:section name="Read-along" id="{36f22c1a-4814-6c95-11ad-2e7e15b9502e}">
           <p14:sldIdLst>
             <p14:sldId id="261"/>
             <p14:sldId id="262"/>
           </p14:sldIdLst>
         </p14:section>
-        <p14:section name="Teach" id="{d2404593-ed13-f0de-9e2e-b0c259b4b363}">
+        <p14:section name="Teach" id="{ddbcb43d-9bf5-08f5-4d2e-4607e1f43588}">
           <p14:sldIdLst>
             <p14:sldId id="263"/>
             <p14:sldId id="264"/>
@@ -158,7 +158,7 @@
             <p14:sldId id="267"/>
           </p14:sldIdLst>
         </p14:section>
-        <p14:section name="Routes" id="{aeb3a336-b2ec-0e31-28f4-65640c1ba8ba}">
+        <p14:section name="Routes" id="{9580db81-cb9a-2ac1-d582-e0fc4a54c689}">
           <p14:sldIdLst>
             <p14:sldId id="268"/>
             <p14:sldId id="269"/>
@@ -166,12 +166,12 @@
             <p14:sldId id="271"/>
           </p14:sldIdLst>
         </p14:section>
-        <p14:section name="Close" id="{7dcd6879-5d6d-2e47-5406-12a5faf41998}">
+        <p14:section name="Close" id="{d0486148-e6f7-37ad-48ed-4c0f193938e1}">
           <p14:sldIdLst>
             <p14:sldId id="272"/>
           </p14:sldIdLst>
         </p14:section>
-        <p14:section name="Answers" id="{1b3ab2db-785b-dbb1-ad06-b25e01d6038c}">
+        <p14:section name="Answers" id="{aa9ba2e4-9b81-17e2-9191-38ab9afa9daa}">
           <p14:sldIdLst>
             <p14:sldId id="273"/>
             <p14:sldId id="274"/>
@@ -1326,7 +1326,7 @@
               <a:rPr lang="en-US" dirty="0"/>
               <a:t>Exit ticket — individual, silent, on a slip or mini-whiteboard. Recall before help: no notes, no lanes, no hints. Collect before pupils leave.
 Question: In which course of a river would you expect to find a waterfall?
-Answer: D   The upper course. Waterfalls form in the steep upper course, near the source.
+Answer: C   The upper course. Waterfalls form in the steep upper course, near the source.
 Source of this question: gate item 1 re-asked (options rotated) — this chapter has no third quick-check module.
 The ebook also holds task 3, "Name that landform", for homework or the next lesson's do now.
 Sort the slips: correct → ready to move on; incorrect → start next lesson in the pre-teach group, with the read-along and the Support lane. Same destination next time.</a:t>
@@ -1600,9 +1600,9 @@
             <a:r>
               <a:rPr lang="en-US" dirty="0"/>
               <a:t>Do now — retrieval. Silent, no notes, no help: recall comes before any support. Give about four minutes.
-1. In which course of a river would you expect to find a waterfall?  →  A   The upper course
+1. In which course of a river would you expect to find a waterfall?  →  D   The upper course
 2. The deep pool worn out at the bottom of a waterfall is called a ___ pool.  →  plunge
-3. What is a meander?  →  A   A large bend in a river
+3. What is a meander?  →  C   A large bend in a river
 Circulate: who gets 3/3 (Stretch route), 2/3 (Core), 0–1 (Support)? Use this to route pupils later in the lesson.</a:t>
             </a:r>
             <a:endParaRPr lang="en-US" dirty="0"/>
@@ -1692,7 +1692,7 @@
             <a:r>
               <a:rPr lang="en-US" dirty="0"/>
               <a:t>Answers — exit ticket: Exit ticket. Reveal the answer; pupils mark their own work in a different colour, then read the "why" together. Same destination for every lane, so one answer serves the whole class.
-Answer: D   The upper course
+Answer: C   The upper course
 Why: Waterfalls form in the steep upper course, near the source.
 Ask a Support pupil to explain one step, and a Stretch pupil to share their extension.</a:t>
             </a:r>
@@ -1783,9 +1783,9 @@
             <a:r>
               <a:rPr lang="en-US" dirty="0"/>
               <a:t>Answers — pupils mark their own in a different colour, then hands up for 3/3, 2/3, 1/3.
-1. A   The upper course. Waterfalls form in the steep upper course, near the source.
+1. D   The upper course. Waterfalls form in the steep upper course, near the source.
 2. plunge. Falling water carves out a plunge pool at the base of the waterfall.
-3. A   A large bend in a river. A meander is a large winding bend in a river's middle or lower course.
+3. C   A large bend in a river. A meander is a large winding bend in a river's middle or lower course.
 Say the route each score points to: 3/3 Stretch, 2/3 Core, 0–1 Support. Pupils may choose to move up.</a:t>
             </a:r>
             <a:endParaRPr lang="en-US" dirty="0"/>
@@ -9484,7 +9484,7 @@
                 <a:ea typeface="Calibri" pitchFamily="34" charset="-122"/>
                 <a:cs typeface="Calibri" pitchFamily="34" charset="-120"/>
               </a:rPr>
-              <a:t>The middle course</a:t>
+              <a:t>At the mouth</a:t>
             </a:r>
             <a:endParaRPr lang="en-US" sz="2400" dirty="0"/>
           </a:p>
@@ -9558,7 +9558,7 @@
                 <a:ea typeface="Calibri" pitchFamily="34" charset="-122"/>
                 <a:cs typeface="Calibri" pitchFamily="34" charset="-120"/>
               </a:rPr>
-              <a:t>At the mouth</a:t>
+              <a:t>The upper course</a:t>
             </a:r>
             <a:endParaRPr lang="en-US" sz="2400" dirty="0"/>
           </a:p>
@@ -9595,7 +9595,7 @@
                 <a:ea typeface="Calibri" pitchFamily="34" charset="-122"/>
                 <a:cs typeface="Calibri" pitchFamily="34" charset="-120"/>
               </a:rPr>
-              <a:t>The upper course</a:t>
+              <a:t>The middle course</a:t>
             </a:r>
             <a:endParaRPr lang="en-US" sz="2400" dirty="0"/>
           </a:p>
@@ -11326,7 +11326,7 @@
                 <a:ea typeface="Calibri" pitchFamily="34" charset="-122"/>
                 <a:cs typeface="Calibri" pitchFamily="34" charset="-120"/>
               </a:rPr>
-              <a:t>The upper course</a:t>
+              <a:t>The middle course</a:t>
             </a:r>
             <a:endParaRPr lang="en-US" sz="2400" dirty="0"/>
           </a:p>
@@ -11363,7 +11363,7 @@
                 <a:ea typeface="Calibri" pitchFamily="34" charset="-122"/>
                 <a:cs typeface="Calibri" pitchFamily="34" charset="-120"/>
               </a:rPr>
-              <a:t>The middle course</a:t>
+              <a:t>At the mouth</a:t>
             </a:r>
             <a:endParaRPr lang="en-US" sz="2400" dirty="0"/>
           </a:p>
@@ -11437,7 +11437,7 @@
                 <a:ea typeface="Calibri" pitchFamily="34" charset="-122"/>
                 <a:cs typeface="Calibri" pitchFamily="34" charset="-120"/>
               </a:rPr>
-              <a:t>At the mouth</a:t>
+              <a:t>The upper course</a:t>
             </a:r>
             <a:endParaRPr lang="en-US" sz="2400" dirty="0"/>
           </a:p>
@@ -11839,7 +11839,7 @@
                 <a:ea typeface="Calibri" pitchFamily="34" charset="-122"/>
                 <a:cs typeface="Calibri" pitchFamily="34" charset="-120"/>
               </a:rPr>
-              <a:t>A large bend in a river</a:t>
+              <a:t>A waterfall that has moved upstream</a:t>
             </a:r>
             <a:endParaRPr lang="en-US" sz="2200" dirty="0"/>
           </a:p>
@@ -11876,7 +11876,7 @@
                 <a:ea typeface="Calibri" pitchFamily="34" charset="-122"/>
                 <a:cs typeface="Calibri" pitchFamily="34" charset="-120"/>
               </a:rPr>
-              <a:t>A waterfall that has moved upstream</a:t>
+              <a:t>A small river that joins a bigger one</a:t>
             </a:r>
             <a:endParaRPr lang="en-US" sz="2200" dirty="0"/>
           </a:p>
@@ -11913,7 +11913,7 @@
                 <a:ea typeface="Calibri" pitchFamily="34" charset="-122"/>
                 <a:cs typeface="Calibri" pitchFamily="34" charset="-120"/>
               </a:rPr>
-              <a:t>A small river that joins a bigger one</a:t>
+              <a:t>A large bend in a river</a:t>
             </a:r>
             <a:endParaRPr lang="en-US" sz="2200" dirty="0"/>
           </a:p>
@@ -12289,7 +12289,7 @@
                 <a:ea typeface="Cambria" pitchFamily="34" charset="-122"/>
                 <a:cs typeface="Cambria" pitchFamily="34" charset="-120"/>
               </a:rPr>
-              <a:t>D   The upper course</a:t>
+              <a:t>C   The upper course</a:t>
             </a:r>
             <a:endParaRPr lang="en-US" sz="1800" dirty="0"/>
           </a:p>
@@ -12810,7 +12810,7 @@
                 <a:ea typeface="Calibri" pitchFamily="34" charset="-122"/>
                 <a:cs typeface="Calibri" pitchFamily="34" charset="-120"/>
               </a:rPr>
-              <a:t>A   The upper course</a:t>
+              <a:t>D   The upper course</a:t>
             </a:r>
             <a:endParaRPr lang="en-US" sz="2200" dirty="0"/>
           </a:p>
@@ -13310,7 +13310,7 @@
                 <a:ea typeface="Calibri" pitchFamily="34" charset="-122"/>
                 <a:cs typeface="Calibri" pitchFamily="34" charset="-120"/>
               </a:rPr>
-              <a:t>A   A large bend in a river</a:t>
+              <a:t>C   A large bend in a river</a:t>
             </a:r>
             <a:endParaRPr lang="en-US" sz="2200" dirty="0"/>
           </a:p>

--- a/decks/geog-rivers/geog-rivers_ch4_landforms.pptx
+++ b/decks/geog-rivers/geog-rivers_ch4_landforms.pptx
@@ -126,30 +126,30 @@
   <p:extLst>
     <p:ext uri="{521415D9-36F7-43E2-AB2F-B90AF26B5E84}">
       <p14:sectionLst xmlns:p14="http://schemas.microsoft.com/office/powerpoint/2010/main">
-        <p14:section name="Opening" id="{cca54645-76b3-151b-8e5f-8832cba302a7}">
+        <p14:section name="Opening" id="{ba1d60ba-0b87-9547-901f-aac136eae108}">
           <p14:sldIdLst>
             <p14:sldId id="256"/>
           </p14:sldIdLst>
         </p14:section>
-        <p14:section name="Gate" id="{e7644fea-74d5-83ba-7d7d-8e55f71b1daf}">
+        <p14:section name="Gate" id="{2f62f266-c005-0dc0-e16c-573553c008e9}">
           <p14:sldIdLst>
             <p14:sldId id="257"/>
             <p14:sldId id="258"/>
           </p14:sldIdLst>
         </p14:section>
-        <p14:section name="Pre-teach" id="{b97ce900-b90d-a8d0-7e04-5bc0b39e1c93}">
+        <p14:section name="Pre-teach" id="{612f7449-f5f7-093f-f1e2-0bf3c13cb8f5}">
           <p14:sldIdLst>
             <p14:sldId id="259"/>
             <p14:sldId id="260"/>
           </p14:sldIdLst>
         </p14:section>
-        <p14:section name="Read-along" id="{36f22c1a-4814-6c95-11ad-2e7e15b9502e}">
+        <p14:section name="Read-along" id="{c2097df1-aaf4-0cbf-e499-144d56723ebd}">
           <p14:sldIdLst>
             <p14:sldId id="261"/>
             <p14:sldId id="262"/>
           </p14:sldIdLst>
         </p14:section>
-        <p14:section name="Teach" id="{ddbcb43d-9bf5-08f5-4d2e-4607e1f43588}">
+        <p14:section name="Teach" id="{223f293d-4acf-e100-5c84-0e62fabdc9ee}">
           <p14:sldIdLst>
             <p14:sldId id="263"/>
             <p14:sldId id="264"/>
@@ -158,7 +158,7 @@
             <p14:sldId id="267"/>
           </p14:sldIdLst>
         </p14:section>
-        <p14:section name="Routes" id="{9580db81-cb9a-2ac1-d582-e0fc4a54c689}">
+        <p14:section name="Routes" id="{30076aed-3cf9-be82-c484-2a4d19d8b583}">
           <p14:sldIdLst>
             <p14:sldId id="268"/>
             <p14:sldId id="269"/>
@@ -166,12 +166,12 @@
             <p14:sldId id="271"/>
           </p14:sldIdLst>
         </p14:section>
-        <p14:section name="Close" id="{d0486148-e6f7-37ad-48ed-4c0f193938e1}">
+        <p14:section name="Close" id="{163853cc-545f-6811-5aab-92ebb69f5de8}">
           <p14:sldIdLst>
             <p14:sldId id="272"/>
           </p14:sldIdLst>
         </p14:section>
-        <p14:section name="Answers" id="{aa9ba2e4-9b81-17e2-9191-38ab9afa9daa}">
+        <p14:section name="Answers" id="{7dcbe64a-aa64-566b-c683-16eb2f35e3a5}">
           <p14:sldIdLst>
             <p14:sldId id="273"/>
             <p14:sldId id="274"/>
